--- a/chapter8/parts/part-02-metadata-and-data-dictionaries/clip.pptx
+++ b/chapter8/parts/part-02-metadata-and-data-dictionaries/clip.pptx
@@ -4327,10 +4327,12 @@
           </a:bodyPr>
           <a:lstStyle/>
           <a:p>
-            <a:pPr>
+            <a:pPr lvl="0" marL="457200" indent="-228600">
+              <a:buFont typeface="Calibri"/>
               <a:spcAft>
                 <a:spcPts val="1000"/>
               </a:spcAft>
+              <a:buSzPct val="100000"/>
               <a:buChar char="•"/>
               <a:lnSpc>
                 <a:spcPts val="2200"/>
@@ -4347,10 +4349,12 @@
             </a:r>
           </a:p>
           <a:p>
-            <a:pPr>
+            <a:pPr lvl="0" marL="457200" indent="-228600">
+              <a:buFont typeface="Calibri"/>
               <a:spcAft>
                 <a:spcPts val="1000"/>
               </a:spcAft>
+              <a:buSzPct val="100000"/>
               <a:buChar char="•"/>
               <a:lnSpc>
                 <a:spcPts val="2200"/>
@@ -4367,10 +4371,12 @@
             </a:r>
           </a:p>
           <a:p>
-            <a:pPr>
+            <a:pPr lvl="0" marL="457200" indent="-228600">
+              <a:buFont typeface="Calibri"/>
               <a:spcAft>
                 <a:spcPts val="1000"/>
               </a:spcAft>
+              <a:buSzPct val="100000"/>
               <a:buChar char="•"/>
               <a:lnSpc>
                 <a:spcPts val="2200"/>
@@ -4506,10 +4512,12 @@
           </a:bodyPr>
           <a:lstStyle/>
           <a:p>
-            <a:pPr>
+            <a:pPr lvl="0" marL="457200" indent="-228600">
+              <a:buFont typeface="Calibri"/>
               <a:spcAft>
                 <a:spcPts val="1000"/>
               </a:spcAft>
+              <a:buSzPct val="100000"/>
               <a:buChar char="•"/>
               <a:lnSpc>
                 <a:spcPts val="2200"/>
@@ -4526,10 +4534,12 @@
             </a:r>
           </a:p>
           <a:p>
-            <a:pPr>
+            <a:pPr lvl="0" marL="457200" indent="-228600">
+              <a:buFont typeface="Calibri"/>
               <a:spcAft>
                 <a:spcPts val="1000"/>
               </a:spcAft>
+              <a:buSzPct val="100000"/>
               <a:buChar char="•"/>
               <a:lnSpc>
                 <a:spcPts val="2200"/>
@@ -4665,10 +4675,12 @@
           </a:bodyPr>
           <a:lstStyle/>
           <a:p>
-            <a:pPr>
+            <a:pPr lvl="0" marL="457200" indent="-228600">
+              <a:buFont typeface="Calibri"/>
               <a:spcAft>
                 <a:spcPts val="1000"/>
               </a:spcAft>
+              <a:buSzPct val="100000"/>
               <a:buChar char="•"/>
               <a:lnSpc>
                 <a:spcPts val="2200"/>
@@ -4804,10 +4816,12 @@
           </a:bodyPr>
           <a:lstStyle/>
           <a:p>
-            <a:pPr>
+            <a:pPr lvl="0" marL="457200" indent="-228600">
+              <a:buFont typeface="Calibri"/>
               <a:spcAft>
                 <a:spcPts val="1000"/>
               </a:spcAft>
+              <a:buSzPct val="100000"/>
               <a:buChar char="•"/>
               <a:lnSpc>
                 <a:spcPts val="2200"/>
@@ -4824,10 +4838,12 @@
             </a:r>
           </a:p>
           <a:p>
-            <a:pPr>
+            <a:pPr lvl="0" marL="457200" indent="-228600">
+              <a:buFont typeface="Calibri"/>
               <a:spcAft>
                 <a:spcPts val="1000"/>
               </a:spcAft>
+              <a:buSzPct val="100000"/>
               <a:buChar char="•"/>
               <a:lnSpc>
                 <a:spcPts val="2200"/>
@@ -4844,10 +4860,12 @@
             </a:r>
           </a:p>
           <a:p>
-            <a:pPr>
+            <a:pPr lvl="0" marL="457200" indent="-228600">
+              <a:buFont typeface="Calibri"/>
               <a:spcAft>
                 <a:spcPts val="1000"/>
               </a:spcAft>
+              <a:buSzPct val="100000"/>
               <a:buChar char="•"/>
               <a:lnSpc>
                 <a:spcPts val="2200"/>
@@ -4983,10 +5001,12 @@
           </a:bodyPr>
           <a:lstStyle/>
           <a:p>
-            <a:pPr>
+            <a:pPr lvl="0" marL="457200" indent="-228600">
+              <a:buFont typeface="Calibri"/>
               <a:spcAft>
                 <a:spcPts val="1000"/>
               </a:spcAft>
+              <a:buSzPct val="100000"/>
               <a:buChar char="•"/>
               <a:lnSpc>
                 <a:spcPts val="2200"/>
@@ -5003,10 +5023,12 @@
             </a:r>
           </a:p>
           <a:p>
-            <a:pPr>
+            <a:pPr lvl="0" marL="457200" indent="-228600">
+              <a:buFont typeface="Calibri"/>
               <a:spcAft>
                 <a:spcPts val="1000"/>
               </a:spcAft>
+              <a:buSzPct val="100000"/>
               <a:buChar char="•"/>
               <a:lnSpc>
                 <a:spcPts val="2200"/>
@@ -5023,10 +5045,12 @@
             </a:r>
           </a:p>
           <a:p>
-            <a:pPr>
+            <a:pPr lvl="0" marL="457200" indent="-228600">
+              <a:buFont typeface="Calibri"/>
               <a:spcAft>
                 <a:spcPts val="1000"/>
               </a:spcAft>
+              <a:buSzPct val="100000"/>
               <a:buChar char="•"/>
               <a:lnSpc>
                 <a:spcPts val="2200"/>
@@ -5162,10 +5186,12 @@
           </a:bodyPr>
           <a:lstStyle/>
           <a:p>
-            <a:pPr>
+            <a:pPr lvl="0" marL="457200" indent="-228600">
+              <a:buFont typeface="Calibri"/>
               <a:spcAft>
                 <a:spcPts val="1000"/>
               </a:spcAft>
+              <a:buSzPct val="100000"/>
               <a:buChar char="•"/>
               <a:lnSpc>
                 <a:spcPts val="2200"/>
@@ -5182,10 +5208,12 @@
             </a:r>
           </a:p>
           <a:p>
-            <a:pPr>
+            <a:pPr lvl="0" marL="457200" indent="-228600">
+              <a:buFont typeface="Calibri"/>
               <a:spcAft>
                 <a:spcPts val="1000"/>
               </a:spcAft>
+              <a:buSzPct val="100000"/>
               <a:buChar char="•"/>
               <a:lnSpc>
                 <a:spcPts val="2200"/>
@@ -5202,10 +5230,12 @@
             </a:r>
           </a:p>
           <a:p>
-            <a:pPr>
+            <a:pPr lvl="0" marL="457200" indent="-228600">
+              <a:buFont typeface="Calibri"/>
               <a:spcAft>
                 <a:spcPts val="1000"/>
               </a:spcAft>
+              <a:buSzPct val="100000"/>
               <a:buChar char="•"/>
               <a:lnSpc>
                 <a:spcPts val="2200"/>
@@ -5222,10 +5252,12 @@
             </a:r>
           </a:p>
           <a:p>
-            <a:pPr>
+            <a:pPr lvl="0" marL="457200" indent="-228600">
+              <a:buFont typeface="Calibri"/>
               <a:spcAft>
                 <a:spcPts val="1000"/>
               </a:spcAft>
+              <a:buSzPct val="100000"/>
               <a:buChar char="•"/>
               <a:lnSpc>
                 <a:spcPts val="2200"/>
@@ -5242,10 +5274,12 @@
             </a:r>
           </a:p>
           <a:p>
-            <a:pPr>
+            <a:pPr lvl="0" marL="457200" indent="-228600">
+              <a:buFont typeface="Calibri"/>
               <a:spcAft>
                 <a:spcPts val="1000"/>
               </a:spcAft>
+              <a:buSzPct val="100000"/>
               <a:buChar char="•"/>
               <a:lnSpc>
                 <a:spcPts val="2200"/>
@@ -5381,10 +5415,12 @@
           </a:bodyPr>
           <a:lstStyle/>
           <a:p>
-            <a:pPr>
+            <a:pPr lvl="0" marL="457200" indent="-228600">
+              <a:buFont typeface="Calibri"/>
               <a:spcAft>
                 <a:spcPts val="1000"/>
               </a:spcAft>
+              <a:buSzPct val="100000"/>
               <a:buChar char="•"/>
               <a:lnSpc>
                 <a:spcPts val="2200"/>
@@ -5401,10 +5437,12 @@
             </a:r>
           </a:p>
           <a:p>
-            <a:pPr>
+            <a:pPr lvl="0" marL="457200" indent="-228600">
+              <a:buFont typeface="Calibri"/>
               <a:spcAft>
                 <a:spcPts val="1000"/>
               </a:spcAft>
+              <a:buSzPct val="100000"/>
               <a:buChar char="•"/>
               <a:lnSpc>
                 <a:spcPts val="2200"/>
@@ -5421,10 +5459,12 @@
             </a:r>
           </a:p>
           <a:p>
-            <a:pPr>
+            <a:pPr lvl="0" marL="457200" indent="-228600">
+              <a:buFont typeface="Calibri"/>
               <a:spcAft>
                 <a:spcPts val="1000"/>
               </a:spcAft>
+              <a:buSzPct val="100000"/>
               <a:buChar char="•"/>
               <a:lnSpc>
                 <a:spcPts val="2200"/>
@@ -5560,10 +5600,12 @@
           </a:bodyPr>
           <a:lstStyle/>
           <a:p>
-            <a:pPr>
+            <a:pPr lvl="0" marL="457200" indent="-228600">
+              <a:buFont typeface="Calibri"/>
               <a:spcAft>
                 <a:spcPts val="1000"/>
               </a:spcAft>
+              <a:buSzPct val="100000"/>
               <a:buChar char="•"/>
               <a:lnSpc>
                 <a:spcPts val="2200"/>
@@ -5580,10 +5622,12 @@
             </a:r>
           </a:p>
           <a:p>
-            <a:pPr>
+            <a:pPr lvl="0" marL="457200" indent="-228600">
+              <a:buFont typeface="Calibri"/>
               <a:spcAft>
                 <a:spcPts val="1000"/>
               </a:spcAft>
+              <a:buSzPct val="100000"/>
               <a:buChar char="•"/>
               <a:lnSpc>
                 <a:spcPts val="2200"/>
@@ -5600,10 +5644,12 @@
             </a:r>
           </a:p>
           <a:p>
-            <a:pPr>
+            <a:pPr lvl="0" marL="457200" indent="-228600">
+              <a:buFont typeface="Calibri"/>
               <a:spcAft>
                 <a:spcPts val="1000"/>
               </a:spcAft>
+              <a:buSzPct val="100000"/>
               <a:buChar char="•"/>
               <a:lnSpc>
                 <a:spcPts val="2200"/>
@@ -5620,10 +5666,12 @@
             </a:r>
           </a:p>
           <a:p>
-            <a:pPr>
+            <a:pPr lvl="0" marL="457200" indent="-228600">
+              <a:buFont typeface="Calibri"/>
               <a:spcAft>
                 <a:spcPts val="1000"/>
               </a:spcAft>
+              <a:buSzPct val="100000"/>
               <a:buChar char="•"/>
               <a:lnSpc>
                 <a:spcPts val="2200"/>
@@ -5640,10 +5688,12 @@
             </a:r>
           </a:p>
           <a:p>
-            <a:pPr>
+            <a:pPr lvl="0" marL="457200" indent="-228600">
+              <a:buFont typeface="Calibri"/>
               <a:spcAft>
                 <a:spcPts val="1000"/>
               </a:spcAft>
+              <a:buSzPct val="100000"/>
               <a:buChar char="•"/>
               <a:lnSpc>
                 <a:spcPts val="2200"/>
@@ -5779,10 +5829,12 @@
           </a:bodyPr>
           <a:lstStyle/>
           <a:p>
-            <a:pPr>
+            <a:pPr lvl="0" marL="457200" indent="-228600">
+              <a:buFont typeface="Calibri"/>
               <a:spcAft>
                 <a:spcPts val="1000"/>
               </a:spcAft>
+              <a:buSzPct val="100000"/>
               <a:buChar char="•"/>
               <a:lnSpc>
                 <a:spcPts val="2200"/>
@@ -5799,10 +5851,12 @@
             </a:r>
           </a:p>
           <a:p>
-            <a:pPr>
+            <a:pPr lvl="0" marL="457200" indent="-228600">
+              <a:buFont typeface="Calibri"/>
               <a:spcAft>
                 <a:spcPts val="1000"/>
               </a:spcAft>
+              <a:buSzPct val="100000"/>
               <a:buChar char="•"/>
               <a:lnSpc>
                 <a:spcPts val="2200"/>
@@ -5819,10 +5873,12 @@
             </a:r>
           </a:p>
           <a:p>
-            <a:pPr>
+            <a:pPr lvl="0" marL="457200" indent="-228600">
+              <a:buFont typeface="Calibri"/>
               <a:spcAft>
                 <a:spcPts val="1000"/>
               </a:spcAft>
+              <a:buSzPct val="100000"/>
               <a:buChar char="•"/>
               <a:lnSpc>
                 <a:spcPts val="2200"/>
@@ -5839,10 +5895,12 @@
             </a:r>
           </a:p>
           <a:p>
-            <a:pPr>
+            <a:pPr lvl="0" marL="457200" indent="-228600">
+              <a:buFont typeface="Calibri"/>
               <a:spcAft>
                 <a:spcPts val="1000"/>
               </a:spcAft>
+              <a:buSzPct val="100000"/>
               <a:buChar char="•"/>
               <a:lnSpc>
                 <a:spcPts val="2200"/>
